--- a/PowerPoints/04 - Definition of CPRL.pptx
+++ b/PowerPoints/04 - Definition of CPRL.pptx
@@ -9161,7 +9161,7 @@
           <a:p>
             <a:r>
               <a:rPr lang="en-US" dirty="0"/>
-              <a:t>Functions cannot have variable parameters</a:t>
+              <a:t>Functions cannot declare variable parameters.</a:t>
             </a:r>
           </a:p>
           <a:p>
